--- a/deck/SENTINEL_Submission.pptx
+++ b/deck/SENTINEL_Submission.pptx
@@ -4997,7 +4997,7 @@
       </p:sp>
       <p:pic>
         <p:nvPicPr>
-          <p:cNvPr id="12" name="Image 0" descr="C:\Users\harsh\AppData\Local\Temp\dash-shots\shot-live.png">    </p:cNvPr>
+          <p:cNvPr id="12" name="Image 0" descr="SENTINEL dashboard, attack blocked">    </p:cNvPr>
           <p:cNvPicPr>
             <a:picLocks noChangeAspect="1"/>
           </p:cNvPicPr>
@@ -5209,7 +5209,7 @@
       </p:sp>
       <p:pic>
         <p:nvPicPr>
-          <p:cNvPr id="4" name="Image 0" descr="C:\Users\harsh\AppData\Local\Temp\dash-shots\shot-outbox.png">    </p:cNvPr>
+          <p:cNvPr id="4" name="Image 0" descr="Outbox with vs without SENTINEL">    </p:cNvPr>
           <p:cNvPicPr>
             <a:picLocks noChangeAspect="1"/>
           </p:cNvPicPr>
@@ -5275,7 +5275,7 @@
       </p:sp>
       <p:pic>
         <p:nvPicPr>
-          <p:cNvPr id="6" name="Image 1" descr="C:\Users\harsh\AppData\Local\Temp\dash-shots\shot-killchain.png">    </p:cNvPr>
+          <p:cNvPr id="6" name="Image 1" descr="Forensic kill chain and Azure capability matrix">    </p:cNvPr>
           <p:cNvPicPr>
             <a:picLocks noChangeAspect="1"/>
           </p:cNvPicPr>
